--- a/reports/GroupMeeting_2026-04-24.pptx
+++ b/reports/GroupMeeting_2026-04-24.pptx
@@ -2684,7 +2684,7 @@
                 <a:ea typeface="Arial" pitchFamily="34" charset="-122"/>
                 <a:cs typeface="Arial" pitchFamily="34" charset="-120"/>
               </a:rPr>
-              <a:t>Pilot 45515869 — same start.gro, corrected path</a:t>
+              <a:t>Pilot 45515869 — corrected path reveals old coord-system was wrong</a:t>
             </a:r>
             <a:endParaRPr lang="en-US" sz="2200" dirty="0"/>
           </a:p>
@@ -2723,7 +2723,7 @@
                 <a:ea typeface="Arial" pitchFamily="34" charset="-122"/>
                 <a:cs typeface="Arial" pitchFamily="34" charset="-120"/>
               </a:rPr>
-              <a:t>Same Ain cMD starting frame, same walker — only CV changed</a:t>
+              <a:t>Same Ain cMD start.gro, only CV changed; walker now reaches s~11 region</a:t>
             </a:r>
             <a:endParaRPr lang="en-US" sz="1400" dirty="0"/>
           </a:p>
@@ -2766,7 +2766,7 @@
                 <a:ea typeface="Arial" pitchFamily="34" charset="-122"/>
                 <a:cs typeface="Arial" pitchFamily="34" charset="-120"/>
               </a:rPr>
-              <a:t>t = 0 on corrected path</a:t>
+              <a:t>t = 0 on corrected path → s = 7.09</a:t>
             </a:r>
             <a:pPr algn="l" marL="342900" indent="-342900">
               <a:spcAft>
@@ -2784,7 +2784,7 @@
                 <a:ea typeface="Arial" pitchFamily="34" charset="-122"/>
                 <a:cs typeface="Arial" pitchFamily="34" charset="-120"/>
               </a:rPr>
-              <a:t>    s(R) = 7.09 — not 1.0; 500 ns cMD endpoint sits mid-path</a:t>
+              <a:t>    On old naive path same start.gro projected to s ≈ 1</a:t>
             </a:r>
             <a:pPr algn="l" marL="342900" indent="-342900">
               <a:spcAft>
@@ -2794,7 +2794,7 @@
               <a:buChar char="•"/>
             </a:pPr>
             <a:r>
-              <a:rPr lang="en-US" sz="1400" b="1" dirty="0">
+              <a:rPr lang="en-US" sz="1400" dirty="0">
                 <a:solidFill>
                   <a:srgbClr val="000000"/>
                 </a:solidFill>
@@ -2802,7 +2802,7 @@
                 <a:ea typeface="Arial" pitchFamily="34" charset="-122"/>
                 <a:cs typeface="Arial" pitchFamily="34" charset="-120"/>
               </a:rPr>
-              <a:t>Escape speed</a:t>
+              <a:t>    → old run was never in O-basin; it was on an artifact coordinate system</a:t>
             </a:r>
             <a:pPr algn="l" marL="342900" indent="-342900">
               <a:spcAft>
@@ -2812,7 +2812,7 @@
               <a:buChar char="•"/>
             </a:pPr>
             <a:r>
-              <a:rPr lang="en-US" sz="1400" dirty="0">
+              <a:rPr lang="en-US" sz="1400" b="1" dirty="0">
                 <a:solidFill>
                   <a:srgbClr val="000000"/>
                 </a:solidFill>
@@ -2820,7 +2820,7 @@
                 <a:ea typeface="Arial" pitchFamily="34" charset="-122"/>
                 <a:cs typeface="Arial" pitchFamily="34" charset="-120"/>
               </a:rPr>
-              <a:t>    Within 110 ps walker reaches max s = 8.94</a:t>
+              <a:t>Current pilot state (sim 1.4 ns, wall 1h51m)</a:t>
             </a:r>
             <a:pPr algn="l" marL="342900" indent="-342900">
               <a:spcAft>
@@ -2838,7 +2838,7 @@
                 <a:ea typeface="Arial" pitchFamily="34" charset="-122"/>
                 <a:cs typeface="Arial" pitchFamily="34" charset="-120"/>
               </a:rPr>
-              <a:t>    Old naive path (45324928): 7.7 ns to reach s = 1.75</a:t>
+              <a:t>    max s = 10.921 at t = 437 ps (new frontier in s = 5–11 band)</a:t>
             </a:r>
             <a:pPr algn="l" marL="342900" indent="-342900">
               <a:spcAft>
@@ -2856,7 +2856,7 @@
                 <a:ea typeface="Arial" pitchFamily="34" charset="-122"/>
                 <a:cs typeface="Arial" pitchFamily="34" charset="-120"/>
               </a:rPr>
-              <a:t>    ≈ 500× qualitative acceleration on path traversal</a:t>
+              <a:t>    Plateau since 437 ps — walker not yet past a secondary barrier at s ≈ 11</a:t>
             </a:r>
             <a:pPr algn="l" marL="342900" indent="-342900">
               <a:spcAft>
@@ -2866,7 +2866,7 @@
               <a:buChar char="•"/>
             </a:pPr>
             <a:r>
-              <a:rPr lang="en-US" sz="1400" b="1" dirty="0">
+              <a:rPr lang="en-US" sz="1400" dirty="0">
                 <a:solidFill>
                   <a:srgbClr val="000000"/>
                 </a:solidFill>
@@ -2874,7 +2874,7 @@
                 <a:ea typeface="Arial" pitchFamily="34" charset="-122"/>
                 <a:cs typeface="Arial" pitchFamily="34" charset="-120"/>
               </a:rPr>
-              <a:t>Interpretation — conservative</a:t>
+              <a:t>    z stays small (~1.5 Å²); wall-hit fraction well below 45324928</a:t>
             </a:r>
             <a:pPr algn="l" marL="342900" indent="-342900">
               <a:spcAft>
@@ -2884,7 +2884,7 @@
               <a:buChar char="•"/>
             </a:pPr>
             <a:r>
-              <a:rPr lang="en-US" sz="1400" dirty="0">
+              <a:rPr lang="en-US" sz="1400" b="1" dirty="0">
                 <a:solidFill>
                   <a:srgbClr val="000000"/>
                 </a:solidFill>
@@ -2892,7 +2892,7 @@
                 <a:ea typeface="Arial" pitchFamily="34" charset="-122"/>
                 <a:cs typeface="Arial" pitchFamily="34" charset="-120"/>
               </a:rPr>
-              <a:t>    NOT claimed replication success; only says "the CV now responds"</a:t>
+              <a:t>Honest framing (NOT replication success)</a:t>
             </a:r>
             <a:pPr algn="l" marL="342900" indent="-342900">
               <a:spcAft>
@@ -2910,7 +2910,97 @@
                 <a:ea typeface="Arial" pitchFamily="34" charset="-122"/>
                 <a:cs typeface="Arial" pitchFamily="34" charset="-120"/>
               </a:rPr>
-              <a:t>    Production gate: max s(R) &gt; 12 (approach Closed endpoint)</a:t>
+              <a:t>    What this shows: coord-system fixed; CV now responds to motion</a:t>
+            </a:r>
+            <a:pPr algn="l" marL="342900" indent="-342900">
+              <a:spcAft>
+                <a:spcPts val="600"/>
+              </a:spcAft>
+              <a:buSzPct val="100000"/>
+              <a:buChar char="•"/>
+            </a:pPr>
+            <a:r>
+              <a:rPr lang="en-US" sz="1400" dirty="0">
+                <a:solidFill>
+                  <a:srgbClr val="000000"/>
+                </a:solidFill>
+                <a:latin typeface="Arial" pitchFamily="34" charset="0"/>
+                <a:ea typeface="Arial" pitchFamily="34" charset="-122"/>
+                <a:cs typeface="Arial" pitchFamily="34" charset="-120"/>
+              </a:rPr>
+              <a:t>    What it does NOT show: walker can reach s = 15 (C-end) alone</a:t>
+            </a:r>
+            <a:pPr algn="l" marL="342900" indent="-342900">
+              <a:spcAft>
+                <a:spcPts val="600"/>
+              </a:spcAft>
+              <a:buSzPct val="100000"/>
+              <a:buChar char="•"/>
+            </a:pPr>
+            <a:r>
+              <a:rPr lang="en-US" sz="1400" dirty="0">
+                <a:solidFill>
+                  <a:srgbClr val="000000"/>
+                </a:solidFill>
+                <a:latin typeface="Arial" pitchFamily="34" charset="0"/>
+                <a:ea typeface="Arial" pitchFamily="34" charset="-122"/>
+                <a:cs typeface="Arial" pitchFamily="34" charset="-120"/>
+              </a:rPr>
+              <a:t>    Gate for 10-walker launch: max s &gt; 12 sustained, or pilot done without</a:t>
+            </a:r>
+            <a:pPr algn="l" marL="342900" indent="-342900">
+              <a:spcAft>
+                <a:spcPts val="600"/>
+              </a:spcAft>
+              <a:buSzPct val="100000"/>
+              <a:buChar char="•"/>
+            </a:pPr>
+            <a:r>
+              <a:rPr lang="en-US" sz="1400" b="1" dirty="0">
+                <a:solidFill>
+                  <a:srgbClr val="000000"/>
+                </a:solidFill>
+                <a:latin typeface="Arial" pitchFamily="34" charset="0"/>
+                <a:ea typeface="Arial" pitchFamily="34" charset="-122"/>
+                <a:cs typeface="Arial" pitchFamily="34" charset="-120"/>
+              </a:rPr>
+              <a:t>Caveat — path is linear-Cartesian, not mechanistic</a:t>
+            </a:r>
+            <a:pPr algn="l" marL="342900" indent="-342900">
+              <a:spcAft>
+                <a:spcPts val="600"/>
+              </a:spcAft>
+              <a:buSzPct val="100000"/>
+              <a:buChar char="•"/>
+            </a:pPr>
+            <a:r>
+              <a:rPr lang="en-US" sz="1400" dirty="0">
+                <a:solidFill>
+                  <a:srgbClr val="000000"/>
+                </a:solidFill>
+                <a:latin typeface="Arial" pitchFamily="34" charset="0"/>
+                <a:ea typeface="Arial" pitchFamily="34" charset="-122"/>
+                <a:cs typeface="Arial" pitchFamily="34" charset="-120"/>
+              </a:rPr>
+              <a:t>    neighbor_msd_cv ≈ 1.96e-14 → no physical intermediate states</a:t>
+            </a:r>
+            <a:pPr algn="l" marL="342900" indent="-342900">
+              <a:spcAft>
+                <a:spcPts val="600"/>
+              </a:spcAft>
+              <a:buSzPct val="100000"/>
+              <a:buChar char="•"/>
+            </a:pPr>
+            <a:r>
+              <a:rPr lang="en-US" sz="1400" dirty="0">
+                <a:solidFill>
+                  <a:srgbClr val="000000"/>
+                </a:solidFill>
+                <a:latin typeface="Arial" pitchFamily="34" charset="0"/>
+                <a:ea typeface="Arial" pitchFamily="34" charset="-122"/>
+                <a:cs typeface="Arial" pitchFamily="34" charset="-120"/>
+              </a:rPr>
+              <a:t>    intermediate s values are geometric waypoints, not validated basins</a:t>
             </a:r>
             <a:endParaRPr lang="en-US" sz="1400" dirty="0"/>
           </a:p>
@@ -2974,7 +3064,7 @@
                 <a:ea typeface="Menlo" pitchFamily="34" charset="-122"/>
                 <a:cs typeface="Menlo" pitchFamily="34" charset="-120"/>
               </a:rPr>
-              <a:t># Corrected path — pilot 45515869 early window</a:t>
+              <a:t># 45515869 COLVAR (sim time, s, z)</a:t>
             </a:r>
             <a:endParaRPr lang="en-US" sz="1100" dirty="0"/>
           </a:p>
@@ -2991,7 +3081,7 @@
                 <a:ea typeface="Menlo" pitchFamily="34" charset="-122"/>
                 <a:cs typeface="Menlo" pitchFamily="34" charset="-120"/>
               </a:rPr>
-              <a:t>t=0      ps  s= 7.09  z=0.031</a:t>
+              <a:t>t=0        ps  s=7.09    z=0.031</a:t>
             </a:r>
             <a:endParaRPr lang="en-US" sz="1100" dirty="0"/>
           </a:p>
@@ -3008,7 +3098,7 @@
                 <a:ea typeface="Menlo" pitchFamily="34" charset="-122"/>
                 <a:cs typeface="Menlo" pitchFamily="34" charset="-120"/>
               </a:rPr>
-              <a:t>t=50     ps  s= 7.92  z=0.048</a:t>
+              <a:t>t=110      ps  s=8.94    z=0.055</a:t>
             </a:r>
             <a:endParaRPr lang="en-US" sz="1100" dirty="0"/>
           </a:p>
@@ -3025,7 +3115,7 @@
                 <a:ea typeface="Menlo" pitchFamily="34" charset="-122"/>
                 <a:cs typeface="Menlo" pitchFamily="34" charset="-120"/>
               </a:rPr>
-              <a:t>t=110    ps  s= 8.94  z=0.055</a:t>
+              <a:t>t=437      ps  s=10.92   z=1.48   ← current max</a:t>
             </a:r>
             <a:endParaRPr lang="en-US" sz="1100" dirty="0"/>
           </a:p>
@@ -3042,7 +3132,24 @@
                 <a:ea typeface="Menlo" pitchFamily="34" charset="-122"/>
                 <a:cs typeface="Menlo" pitchFamily="34" charset="-120"/>
               </a:rPr>
-              <a:t># Old path (45324928): s=1.75 only after 7.7 ns</a:t>
+              <a:t>t=1404     ps  s=~10.2   z=~1.3   ← plateau</a:t>
+            </a:r>
+            <a:endParaRPr lang="en-US" sz="1100" dirty="0"/>
+          </a:p>
+          <a:p>
+            <a:pPr algn="l" indent="0" marL="0">
+              <a:buNone/>
+            </a:pPr>
+            <a:r>
+              <a:rPr lang="en-US" sz="1100" dirty="0">
+                <a:solidFill>
+                  <a:srgbClr val="000000"/>
+                </a:solidFill>
+                <a:latin typeface="Menlo" pitchFamily="34" charset="0"/>
+                <a:ea typeface="Menlo" pitchFamily="34" charset="-122"/>
+                <a:cs typeface="Menlo" pitchFamily="34" charset="-120"/>
+              </a:rPr>
+              <a:t># Old path 45324928: max s=1.75 after 7.7 ns, then retreat</a:t>
             </a:r>
             <a:endParaRPr lang="en-US" sz="1100" dirty="0"/>
           </a:p>
@@ -3056,8 +3163,8 @@
         </p:nvSpPr>
         <p:spPr>
           <a:xfrm>
-            <a:off x="457200" y="6327648"/>
-            <a:ext cx="11277295" cy="164592"/>
+            <a:off x="457200" y="6163056"/>
+            <a:ext cx="11277295" cy="329184"/>
           </a:xfrm>
           <a:prstGeom prst="rect">
             <a:avLst/>
@@ -3081,7 +3188,24 @@
                 <a:ea typeface="Arial" pitchFamily="34" charset="-122"/>
                 <a:cs typeface="Arial" pitchFamily="34" charset="-120"/>
               </a:rPr>
-              <a:t>Source: Codex independent verification — commit 7e7ba6a</a:t>
+              <a:t>Source: replication/metadynamics/path_seqaligned/REVERSE_SANITY_CHECK.md</a:t>
+            </a:r>
+            <a:endParaRPr lang="en-US" sz="900" dirty="0"/>
+          </a:p>
+          <a:p>
+            <a:pPr algn="l" indent="0" marL="0">
+              <a:buNone/>
+            </a:pPr>
+            <a:r>
+              <a:rPr lang="en-US" sz="900" dirty="0">
+                <a:solidFill>
+                  <a:srgbClr val="555555"/>
+                </a:solidFill>
+                <a:latin typeface="Arial" pitchFamily="34" charset="0"/>
+                <a:ea typeface="Arial" pitchFamily="34" charset="-122"/>
+                <a:cs typeface="Arial" pitchFamily="34" charset="-120"/>
+              </a:rPr>
+              <a:t>Source: Codex independent verify — commit 7e7ba6a</a:t>
             </a:r>
             <a:endParaRPr lang="en-US" sz="900" dirty="0"/>
           </a:p>
@@ -3120,7 +3244,7 @@
                 <a:ea typeface="Arial" pitchFamily="34" charset="-122"/>
                 <a:cs typeface="Arial" pitchFamily="34" charset="-120"/>
               </a:rPr>
-              <a:t>Slide 9 / 17  ·  pilot 45515869 early signal  ·  gate: max s &gt; 12</a:t>
+              <a:t>Slide 9 / 17  ·  pilot: s-range 7→11 exposed  ·  s&gt;12 gate still pending</a:t>
             </a:r>
             <a:endParaRPr lang="en-US" sz="900" dirty="0"/>
           </a:p>
@@ -16042,8 +16166,8 @@
         </p:nvSpPr>
         <p:spPr>
           <a:xfrm>
-            <a:off x="457200" y="6163056"/>
-            <a:ext cx="11277295" cy="329184"/>
+            <a:off x="457200" y="5998464"/>
+            <a:ext cx="11277295" cy="493776"/>
           </a:xfrm>
           <a:prstGeom prst="rect">
             <a:avLst/>
@@ -16085,6 +16209,23 @@
                 <a:cs typeface="Arial" pitchFamily="34" charset="-120"/>
               </a:rPr>
               <a:t>Source: replication/metadynamics/path_seqaligned/verify_and_materialize_seqaligned_path.py</a:t>
+            </a:r>
+            <a:endParaRPr lang="en-US" sz="900" dirty="0"/>
+          </a:p>
+          <a:p>
+            <a:pPr algn="l" indent="0" marL="0">
+              <a:buNone/>
+            </a:pPr>
+            <a:r>
+              <a:rPr lang="en-US" sz="900" dirty="0">
+                <a:solidFill>
+                  <a:srgbClr val="555555"/>
+                </a:solidFill>
+                <a:latin typeface="Arial" pitchFamily="34" charset="0"/>
+                <a:ea typeface="Arial" pitchFamily="34" charset="-122"/>
+                <a:cs typeface="Arial" pitchFamily="34" charset="-120"/>
+              </a:rPr>
+              <a:t>Source: replication/metadynamics/path_seqaligned/REVERSE_SANITY_CHECK.md (endpoint round-trip 1WDW→1.14, 3CEP→14.86)</a:t>
             </a:r>
             <a:endParaRPr lang="en-US" sz="900" dirty="0"/>
           </a:p>

--- a/reports/GroupMeeting_2026-04-24.pptx
+++ b/reports/GroupMeeting_2026-04-24.pptx
@@ -2684,7 +2684,7 @@
                 <a:ea typeface="Arial" pitchFamily="34" charset="-122"/>
                 <a:cs typeface="Arial" pitchFamily="34" charset="-120"/>
               </a:rPr>
-              <a:t>Pilot 45515869 — corrected path reveals old coord-system was wrong</a:t>
+              <a:t>Pilot 45515869 — GATE CLEARED at t=6085 ps (max_s=12.87)</a:t>
             </a:r>
             <a:endParaRPr lang="en-US" sz="2200" dirty="0"/>
           </a:p>
@@ -2723,7 +2723,7 @@
                 <a:ea typeface="Arial" pitchFamily="34" charset="-122"/>
                 <a:cs typeface="Arial" pitchFamily="34" charset="-120"/>
               </a:rPr>
-              <a:t>Same Ain cMD start.gro, only CV changed; walker now reaches s~11 region</a:t>
+              <a:t>4.3 ns plateau 后 single transient 越过 s=12 — path geometry 端到端通路 confirm</a:t>
             </a:r>
             <a:endParaRPr lang="en-US" sz="1400" dirty="0"/>
           </a:p>
@@ -2766,7 +2766,7 @@
                 <a:ea typeface="Arial" pitchFamily="34" charset="-122"/>
                 <a:cs typeface="Arial" pitchFamily="34" charset="-120"/>
               </a:rPr>
-              <a:t>t = 0 on corrected path → s = 7.09</a:t>
+              <a:t>Pilot 轨迹（sim 到 6.2 ns）</a:t>
             </a:r>
             <a:pPr algn="l" marL="342900" indent="-342900">
               <a:spcAft>
@@ -2784,7 +2784,7 @@
                 <a:ea typeface="Arial" pitchFamily="34" charset="-122"/>
                 <a:cs typeface="Arial" pitchFamily="34" charset="-120"/>
               </a:rPr>
-              <a:t>    On old naive path same start.gro projected to s ≈ 1</a:t>
+              <a:t>    t=0       s=7.09  (start.gro = 500 ns cMD 终态, 新 coord 下是 mid-path)</a:t>
             </a:r>
             <a:pPr algn="l" marL="342900" indent="-342900">
               <a:spcAft>
@@ -2802,7 +2802,7 @@
                 <a:ea typeface="Arial" pitchFamily="34" charset="-122"/>
                 <a:cs typeface="Arial" pitchFamily="34" charset="-120"/>
               </a:rPr>
-              <a:t>    → old run was never in O-basin; it was on an artifact coordinate system</a:t>
+              <a:t>    t=437 ps  s=10.92 (first frontier)</a:t>
             </a:r>
             <a:pPr algn="l" marL="342900" indent="-342900">
               <a:spcAft>
@@ -2812,7 +2812,7 @@
               <a:buChar char="•"/>
             </a:pPr>
             <a:r>
-              <a:rPr lang="en-US" sz="1400" b="1" dirty="0">
+              <a:rPr lang="en-US" sz="1400" dirty="0">
                 <a:solidFill>
                   <a:srgbClr val="000000"/>
                 </a:solidFill>
@@ -2820,7 +2820,7 @@
                 <a:ea typeface="Arial" pitchFamily="34" charset="-122"/>
                 <a:cs typeface="Arial" pitchFamily="34" charset="-120"/>
               </a:rPr>
-              <a:t>Current pilot state (sim 1.4 ns, wall 1h51m)</a:t>
+              <a:t>    t=437 ps–6085 ps  plateau 4.3 ns at max_s=10.92</a:t>
             </a:r>
             <a:pPr algn="l" marL="342900" indent="-342900">
               <a:spcAft>
@@ -2838,7 +2838,7 @@
                 <a:ea typeface="Arial" pitchFamily="34" charset="-122"/>
                 <a:cs typeface="Arial" pitchFamily="34" charset="-120"/>
               </a:rPr>
-              <a:t>    max s = 10.921 at t = 437 ps (new frontier in s = 5–11 band)</a:t>
+              <a:t>    **t=6085 ps  s=12.87 — transient breakthrough, GATE CLEARED**</a:t>
             </a:r>
             <a:pPr algn="l" marL="342900" indent="-342900">
               <a:spcAft>
@@ -2848,7 +2848,7 @@
               <a:buChar char="•"/>
             </a:pPr>
             <a:r>
-              <a:rPr lang="en-US" sz="1400" dirty="0">
+              <a:rPr lang="en-US" sz="1400" b="1" dirty="0">
                 <a:solidFill>
                   <a:srgbClr val="000000"/>
                 </a:solidFill>
@@ -2856,7 +2856,7 @@
                 <a:ea typeface="Arial" pitchFamily="34" charset="-122"/>
                 <a:cs typeface="Arial" pitchFamily="34" charset="-120"/>
               </a:rPr>
-              <a:t>    Plateau since 437 ps — walker not yet past a secondary barrier at s ≈ 11</a:t>
+              <a:t>Gate criteria</a:t>
             </a:r>
             <a:pPr algn="l" marL="342900" indent="-342900">
               <a:spcAft>
@@ -2874,7 +2874,7 @@
                 <a:ea typeface="Arial" pitchFamily="34" charset="-122"/>
                 <a:cs typeface="Arial" pitchFamily="34" charset="-120"/>
               </a:rPr>
-              <a:t>    z stays small (~1.5 Å²); wall-hit fraction well below 45324928</a:t>
+              <a:t>    fraction(s&gt;10) = 3.0%, fraction(s&gt;12) = 0.05% (single transient ~120 ps)</a:t>
             </a:r>
             <a:pPr algn="l" marL="342900" indent="-342900">
               <a:spcAft>
@@ -2884,7 +2884,7 @@
               <a:buChar char="•"/>
             </a:pPr>
             <a:r>
-              <a:rPr lang="en-US" sz="1400" b="1" dirty="0">
+              <a:rPr lang="en-US" sz="1400" dirty="0">
                 <a:solidFill>
                   <a:srgbClr val="000000"/>
                 </a:solidFill>
@@ -2892,7 +2892,7 @@
                 <a:ea typeface="Arial" pitchFamily="34" charset="-122"/>
                 <a:cs typeface="Arial" pitchFamily="34" charset="-120"/>
               </a:rPr>
-              <a:t>Honest framing (NOT replication success)</a:t>
+              <a:t>    Not sustained — 没在 C-basin 驻留, walker 退回 s=7-9 震荡</a:t>
             </a:r>
             <a:pPr algn="l" marL="342900" indent="-342900">
               <a:spcAft>
@@ -2902,7 +2902,7 @@
               <a:buChar char="•"/>
             </a:pPr>
             <a:r>
-              <a:rPr lang="en-US" sz="1400" dirty="0">
+              <a:rPr lang="en-US" sz="1400" b="1" dirty="0">
                 <a:solidFill>
                   <a:srgbClr val="000000"/>
                 </a:solidFill>
@@ -2910,7 +2910,7 @@
                 <a:ea typeface="Arial" pitchFamily="34" charset="-122"/>
                 <a:cs typeface="Arial" pitchFamily="34" charset="-120"/>
               </a:rPr>
-              <a:t>    What this shows: coord-system fixed; CV now responds to motion</a:t>
+              <a:t>End-to-end path validation</a:t>
             </a:r>
             <a:pPr algn="l" marL="342900" indent="-342900">
               <a:spcAft>
@@ -2928,7 +2928,7 @@
                 <a:ea typeface="Arial" pitchFamily="34" charset="-122"/>
                 <a:cs typeface="Arial" pitchFamily="34" charset="-120"/>
               </a:rPr>
-              <a:t>    What it does NOT show: walker can reach s = 15 (C-end) alone</a:t>
+              <a:t>    Walker 物理能跨 s=12 证明 corrected path 从 O 到近 C 整条通路通</a:t>
             </a:r>
             <a:pPr algn="l" marL="342900" indent="-342900">
               <a:spcAft>
@@ -2946,7 +2946,7 @@
                 <a:ea typeface="Arial" pitchFamily="34" charset="-122"/>
                 <a:cs typeface="Arial" pitchFamily="34" charset="-120"/>
               </a:rPr>
-              <a:t>    Gate for 10-walker launch: max s &gt; 12 sustained, or pilot done without</a:t>
+              <a:t>    Single-walker well-tempered 填 bias 能推过次级 barrier (耗时 ~4.3 ns)</a:t>
             </a:r>
             <a:pPr algn="l" marL="342900" indent="-342900">
               <a:spcAft>
@@ -2956,7 +2956,7 @@
               <a:buChar char="•"/>
             </a:pPr>
             <a:r>
-              <a:rPr lang="en-US" sz="1400" b="1" dirty="0">
+              <a:rPr lang="en-US" sz="1400" dirty="0">
                 <a:solidFill>
                   <a:srgbClr val="000000"/>
                 </a:solidFill>
@@ -2964,7 +2964,7 @@
                 <a:ea typeface="Arial" pitchFamily="34" charset="-122"/>
                 <a:cs typeface="Arial" pitchFamily="34" charset="-120"/>
               </a:rPr>
-              <a:t>Caveat — path is linear-Cartesian, not mechanistic</a:t>
+              <a:t>    10-walker shared bias 预期能把 transient 堆成 sustained C-basin occupancy</a:t>
             </a:r>
             <a:pPr algn="l" marL="342900" indent="-342900">
               <a:spcAft>
@@ -2974,7 +2974,7 @@
               <a:buChar char="•"/>
             </a:pPr>
             <a:r>
-              <a:rPr lang="en-US" sz="1400" dirty="0">
+              <a:rPr lang="en-US" sz="1400" b="1" dirty="0">
                 <a:solidFill>
                   <a:srgbClr val="000000"/>
                 </a:solidFill>
@@ -2982,7 +2982,7 @@
                 <a:ea typeface="Arial" pitchFamily="34" charset="-122"/>
                 <a:cs typeface="Arial" pitchFamily="34" charset="-120"/>
               </a:rPr>
-              <a:t>    neighbor_msd_cv ≈ 1.96e-14 → no physical intermediate states</a:t>
+              <a:t>Caveat — path is linear-Cartesian, not mechanistic</a:t>
             </a:r>
             <a:pPr algn="l" marL="342900" indent="-342900">
               <a:spcAft>
@@ -3000,7 +3000,7 @@
                 <a:ea typeface="Arial" pitchFamily="34" charset="-122"/>
                 <a:cs typeface="Arial" pitchFamily="34" charset="-120"/>
               </a:rPr>
-              <a:t>    intermediate s values are geometric waypoints, not validated basins</a:t>
+              <a:t>    neighbor_msd_cv ≈ 1.96e-14 → s 是 geometric waypoint, 不是 validated basin</a:t>
             </a:r>
             <a:endParaRPr lang="en-US" sz="1400" dirty="0"/>
           </a:p>
@@ -3064,7 +3064,7 @@
                 <a:ea typeface="Menlo" pitchFamily="34" charset="-122"/>
                 <a:cs typeface="Menlo" pitchFamily="34" charset="-120"/>
               </a:rPr>
-              <a:t># 45515869 COLVAR (sim time, s, z)</a:t>
+              <a:t># 45515869 COLVAR summary (sim 6.2 ns, wall 8h20m)</a:t>
             </a:r>
             <a:endParaRPr lang="en-US" sz="1100" dirty="0"/>
           </a:p>
@@ -3081,7 +3081,7 @@
                 <a:ea typeface="Menlo" pitchFamily="34" charset="-122"/>
                 <a:cs typeface="Menlo" pitchFamily="34" charset="-120"/>
               </a:rPr>
-              <a:t>t=0        ps  s=7.09    z=0.031</a:t>
+              <a:t>t=0        ps  s=7.09   z=0.03</a:t>
             </a:r>
             <a:endParaRPr lang="en-US" sz="1100" dirty="0"/>
           </a:p>
@@ -3098,7 +3098,7 @@
                 <a:ea typeface="Menlo" pitchFamily="34" charset="-122"/>
                 <a:cs typeface="Menlo" pitchFamily="34" charset="-120"/>
               </a:rPr>
-              <a:t>t=110      ps  s=8.94    z=0.055</a:t>
+              <a:t>t=437      ps  s=10.92  z=1.48  ← first frontier</a:t>
             </a:r>
             <a:endParaRPr lang="en-US" sz="1100" dirty="0"/>
           </a:p>
@@ -3115,7 +3115,7 @@
                 <a:ea typeface="Menlo" pitchFamily="34" charset="-122"/>
                 <a:cs typeface="Menlo" pitchFamily="34" charset="-120"/>
               </a:rPr>
-              <a:t>t=437      ps  s=10.92   z=1.48   ← current max</a:t>
+              <a:t>t=437-6085 ps  plateau at max_s=10.92</a:t>
             </a:r>
             <a:endParaRPr lang="en-US" sz="1100" dirty="0"/>
           </a:p>
@@ -3132,7 +3132,7 @@
                 <a:ea typeface="Menlo" pitchFamily="34" charset="-122"/>
                 <a:cs typeface="Menlo" pitchFamily="34" charset="-120"/>
               </a:rPr>
-              <a:t>t=1404     ps  s=~10.2   z=~1.3   ← plateau</a:t>
+              <a:t>t=6085     ps  s=12.87  ← GATE CLEARED (transient ~120 ps)</a:t>
             </a:r>
             <a:endParaRPr lang="en-US" sz="1100" dirty="0"/>
           </a:p>
@@ -3149,7 +3149,7 @@
                 <a:ea typeface="Menlo" pitchFamily="34" charset="-122"/>
                 <a:cs typeface="Menlo" pitchFamily="34" charset="-120"/>
               </a:rPr>
-              <a:t># Old path 45324928: max s=1.75 after 7.7 ns, then retreat</a:t>
+              <a:t>t=6200     ps  s=7-9    ← walker retreated, 震荡 region</a:t>
             </a:r>
             <a:endParaRPr lang="en-US" sz="1100" dirty="0"/>
           </a:p>
@@ -3188,7 +3188,7 @@
                 <a:ea typeface="Arial" pitchFamily="34" charset="-122"/>
                 <a:cs typeface="Arial" pitchFamily="34" charset="-120"/>
               </a:rPr>
-              <a:t>Source: replication/metadynamics/path_seqaligned/REVERSE_SANITY_CHECK.md</a:t>
+              <a:t>Source: Longleaf 45515869 COLVAR (live)</a:t>
             </a:r>
             <a:endParaRPr lang="en-US" sz="900" dirty="0"/>
           </a:p>
@@ -3205,7 +3205,7 @@
                 <a:ea typeface="Arial" pitchFamily="34" charset="-122"/>
                 <a:cs typeface="Arial" pitchFamily="34" charset="-120"/>
               </a:rPr>
-              <a:t>Source: Codex independent verify — commit 7e7ba6a</a:t>
+              <a:t>Source: replication/metadynamics/path_seqaligned/REVERSE_SANITY_CHECK.md</a:t>
             </a:r>
             <a:endParaRPr lang="en-US" sz="900" dirty="0"/>
           </a:p>
@@ -3244,7 +3244,7 @@
                 <a:ea typeface="Arial" pitchFamily="34" charset="-122"/>
                 <a:cs typeface="Arial" pitchFamily="34" charset="-120"/>
               </a:rPr>
-              <a:t>Slide 9 / 17  ·  pilot: s-range 7→11 exposed  ·  s&gt;12 gate still pending</a:t>
+              <a:t>Slide 9 / 17  ·  GATE CLEARED · 10-walker launch 已 conditional-approve</a:t>
             </a:r>
             <a:endParaRPr lang="en-US" sz="900" dirty="0"/>
           </a:p>
@@ -10186,6 +10186,42 @@
                 <a:cs typeface="Arial" pitchFamily="34" charset="-120"/>
               </a:rPr>
               <a:t>    Replicator framing = asymptotic value 0 once FES converges; owner framing = reusable artifact for Yu/Amin/Raswanth</a:t>
+            </a:r>
+            <a:pPr algn="l" marL="342900" indent="-342900">
+              <a:spcAft>
+                <a:spcPts val="600"/>
+              </a:spcAft>
+              <a:buSzPct val="100000"/>
+              <a:buChar char="•"/>
+            </a:pPr>
+            <a:r>
+              <a:rPr lang="en-US" sz="1400" b="1" dirty="0">
+                <a:solidFill>
+                  <a:srgbClr val="000000"/>
+                </a:solidFill>
+                <a:latin typeface="Arial" pitchFamily="34" charset="0"/>
+                <a:ea typeface="Arial" pitchFamily="34" charset="-122"/>
+                <a:cs typeface="Arial" pitchFamily="34" charset="-120"/>
+              </a:rPr>
+              <a:t>Pilot 45515869 于 t=6085 ps 单次 transient 越过 s=12 gate</a:t>
+            </a:r>
+            <a:pPr algn="l" marL="342900" indent="-342900">
+              <a:spcAft>
+                <a:spcPts val="600"/>
+              </a:spcAft>
+              <a:buSzPct val="100000"/>
+              <a:buChar char="•"/>
+            </a:pPr>
+            <a:r>
+              <a:rPr lang="en-US" sz="1400" dirty="0">
+                <a:solidFill>
+                  <a:srgbClr val="000000"/>
+                </a:solidFill>
+                <a:latin typeface="Arial" pitchFamily="34" charset="0"/>
+                <a:ea typeface="Arial" pitchFamily="34" charset="-122"/>
+                <a:cs typeface="Arial" pitchFamily="34" charset="-120"/>
+              </a:rPr>
+              <a:t>    corrected path 端到端通路 confirm; 10-walker shared bias 启动依据</a:t>
             </a:r>
             <a:endParaRPr lang="en-US" sz="1400" dirty="0"/>
           </a:p>

--- a/reports/GroupMeeting_2026-04-24.pptx
+++ b/reports/GroupMeeting_2026-04-24.pptx
@@ -2684,7 +2684,7 @@
                 <a:ea typeface="Arial" pitchFamily="34" charset="-122"/>
                 <a:cs typeface="Arial" pitchFamily="34" charset="-120"/>
               </a:rPr>
-              <a:t>Pilot 45515869 — GATE CLEARED at t=6085 ps (max_s=12.87)</a:t>
+              <a:t>Pilot 45515869 — corrected path exploration (s=1 to 12)</a:t>
             </a:r>
             <a:endParaRPr lang="en-US" sz="2200" dirty="0"/>
           </a:p>
@@ -2723,7 +2723,7 @@
                 <a:ea typeface="Arial" pitchFamily="34" charset="-122"/>
                 <a:cs typeface="Arial" pitchFamily="34" charset="-120"/>
               </a:rPr>
-              <a:t>4.3 ns plateau 后 single transient 越过 s=12 — path geometry 端到端通路 confirm</a:t>
+              <a:t>Pilot 8 ns samples s=1→12.87; start.gro is off-path (z=1.68), not a clean mid-path state</a:t>
             </a:r>
             <a:endParaRPr lang="en-US" sz="1400" dirty="0"/>
           </a:p>
@@ -2766,7 +2766,7 @@
                 <a:ea typeface="Arial" pitchFamily="34" charset="-122"/>
                 <a:cs typeface="Arial" pitchFamily="34" charset="-120"/>
               </a:rPr>
-              <a:t>Pilot 轨迹（sim 到 6.2 ns）</a:t>
+              <a:t>Pilot 实际 sample 分布（8 ns, 40193 frames）</a:t>
             </a:r>
             <a:pPr algn="l" marL="342900" indent="-342900">
               <a:spcAft>
@@ -2784,7 +2784,7 @@
                 <a:ea typeface="Arial" pitchFamily="34" charset="-122"/>
                 <a:cs typeface="Arial" pitchFamily="34" charset="-120"/>
               </a:rPr>
-              <a:t>    t=0       s=7.09  (start.gro = 500 ns cMD 终态, 新 coord 下是 mid-path)</a:t>
+              <a:t>    s=1: 到过 (min_s=1.000 at t=4920 ps)</a:t>
             </a:r>
             <a:pPr algn="l" marL="342900" indent="-342900">
               <a:spcAft>
@@ -2802,7 +2802,7 @@
                 <a:ea typeface="Arial" pitchFamily="34" charset="-122"/>
                 <a:cs typeface="Arial" pitchFamily="34" charset="-120"/>
               </a:rPr>
-              <a:t>    t=437 ps  s=10.92 (first frontier)</a:t>
+              <a:t>    s&lt;3: 26.7% 时间；s=7: 11.3% 时间；s=12: 0.05% transient</a:t>
             </a:r>
             <a:pPr algn="l" marL="342900" indent="-342900">
               <a:spcAft>
@@ -2820,7 +2820,7 @@
                 <a:ea typeface="Arial" pitchFamily="34" charset="-122"/>
                 <a:cs typeface="Arial" pitchFamily="34" charset="-120"/>
               </a:rPr>
-              <a:t>    t=437 ps–6085 ps  plateau 4.3 ns at max_s=10.92</a:t>
+              <a:t>    整段 path s=1 到 12 已被 walker 物理访问</a:t>
             </a:r>
             <a:pPr algn="l" marL="342900" indent="-342900">
               <a:spcAft>
@@ -2830,7 +2830,7 @@
               <a:buChar char="•"/>
             </a:pPr>
             <a:r>
-              <a:rPr lang="en-US" sz="1400" dirty="0">
+              <a:rPr lang="en-US" sz="1400" b="1" dirty="0">
                 <a:solidFill>
                   <a:srgbClr val="000000"/>
                 </a:solidFill>
@@ -2838,7 +2838,7 @@
                 <a:ea typeface="Arial" pitchFamily="34" charset="-122"/>
                 <a:cs typeface="Arial" pitchFamily="34" charset="-120"/>
               </a:rPr>
-              <a:t>    **t=6085 ps  s=12.87 — transient breakthrough, GATE CLEARED**</a:t>
+              <a:t>关键 caveat — start.gro 是 off-path endpoint</a:t>
             </a:r>
             <a:pPr algn="l" marL="342900" indent="-342900">
               <a:spcAft>
@@ -2848,7 +2848,7 @@
               <a:buChar char="•"/>
             </a:pPr>
             <a:r>
-              <a:rPr lang="en-US" sz="1400" b="1" dirty="0">
+              <a:rPr lang="en-US" sz="1400" dirty="0">
                 <a:solidFill>
                   <a:srgbClr val="000000"/>
                 </a:solidFill>
@@ -2856,7 +2856,7 @@
                 <a:ea typeface="Arial" pitchFamily="34" charset="-122"/>
                 <a:cs typeface="Arial" pitchFamily="34" charset="-120"/>
               </a:rPr>
-              <a:t>Gate criteria</a:t>
+              <a:t>    t=0 投影 s=7.09 但 z=1.68 Å²（不在 path 上）</a:t>
             </a:r>
             <a:pPr algn="l" marL="342900" indent="-342900">
               <a:spcAft>
@@ -2874,7 +2874,7 @@
                 <a:ea typeface="Arial" pitchFamily="34" charset="-122"/>
                 <a:cs typeface="Arial" pitchFamily="34" charset="-120"/>
               </a:rPr>
-              <a:t>    fraction(s&gt;10) = 3.0%, fraction(s&gt;12) = 0.05% (single transient ~120 ps)</a:t>
+              <a:t>    直接 Kabsch vs 1WDW 仅 1.59 Å RMSD（物理上仍偏 Open 侧）</a:t>
             </a:r>
             <a:pPr algn="l" marL="342900" indent="-342900">
               <a:spcAft>
@@ -2892,7 +2892,7 @@
                 <a:ea typeface="Arial" pitchFamily="34" charset="-122"/>
                 <a:cs typeface="Arial" pitchFamily="34" charset="-120"/>
               </a:rPr>
-              <a:t>    Not sustained — 没在 C-basin 驻留, walker 退回 s=7-9 震荡</a:t>
+              <a:t>    s=7 不代表 'Ain 在 PC basin'，只是 linear-interp soft-min 偏中段</a:t>
             </a:r>
             <a:pPr algn="l" marL="342900" indent="-342900">
               <a:spcAft>
@@ -2910,7 +2910,7 @@
                 <a:ea typeface="Arial" pitchFamily="34" charset="-122"/>
                 <a:cs typeface="Arial" pitchFamily="34" charset="-120"/>
               </a:rPr>
-              <a:t>End-to-end path validation</a:t>
+              <a:t>max_s=12.87 near-wall transient</a:t>
             </a:r>
             <a:pPr algn="l" marL="342900" indent="-342900">
               <a:spcAft>
@@ -2928,7 +2928,7 @@
                 <a:ea typeface="Arial" pitchFamily="34" charset="-122"/>
                 <a:cs typeface="Arial" pitchFamily="34" charset="-120"/>
               </a:rPr>
-              <a:t>    Walker 物理能跨 s=12 证明 corrected path 从 O 到近 C 整条通路通</a:t>
+              <a:t>    t=6085 ps: s=12.87, z=2.04 (UPPER_WALLS AT=2.5 附近)</a:t>
             </a:r>
             <a:pPr algn="l" marL="342900" indent="-342900">
               <a:spcAft>
@@ -2946,7 +2946,7 @@
                 <a:ea typeface="Arial" pitchFamily="34" charset="-122"/>
                 <a:cs typeface="Arial" pitchFamily="34" charset="-120"/>
               </a:rPr>
-              <a:t>    Single-walker well-tempered 填 bias 能推过次级 barrier (耗时 ~4.3 ns)</a:t>
+              <a:t>    单次 ~120 ps 宽，不 sustained；不算 clean barrier crossing</a:t>
             </a:r>
             <a:pPr algn="l" marL="342900" indent="-342900">
               <a:spcAft>
@@ -2956,7 +2956,7 @@
               <a:buChar char="•"/>
             </a:pPr>
             <a:r>
-              <a:rPr lang="en-US" sz="1400" dirty="0">
+              <a:rPr lang="en-US" sz="1400" b="1" dirty="0">
                 <a:solidFill>
                   <a:srgbClr val="000000"/>
                 </a:solidFill>
@@ -2964,7 +2964,7 @@
                 <a:ea typeface="Arial" pitchFamily="34" charset="-122"/>
                 <a:cs typeface="Arial" pitchFamily="34" charset="-120"/>
               </a:rPr>
-              <a:t>    10-walker shared bias 预期能把 transient 堆成 sustained C-basin occupancy</a:t>
+              <a:t>Vs baseline 45324928 (老 path)</a:t>
             </a:r>
             <a:pPr algn="l" marL="342900" indent="-342900">
               <a:spcAft>
@@ -2974,7 +2974,7 @@
               <a:buChar char="•"/>
             </a:pPr>
             <a:r>
-              <a:rPr lang="en-US" sz="1400" b="1" dirty="0">
+              <a:rPr lang="en-US" sz="1400" dirty="0">
                 <a:solidFill>
                   <a:srgbClr val="000000"/>
                 </a:solidFill>
@@ -2982,7 +2982,7 @@
                 <a:ea typeface="Arial" pitchFamily="34" charset="-122"/>
                 <a:cs typeface="Arial" pitchFamily="34" charset="-120"/>
               </a:rPr>
-              <a:t>Caveat — path is linear-Cartesian, not mechanistic</a:t>
+              <a:t>    老 path 16 ns: s ∈ [1.00, 1.90], 75% 时间 s&lt;1.25</a:t>
             </a:r>
             <a:pPr algn="l" marL="342900" indent="-342900">
               <a:spcAft>
@@ -3000,7 +3000,7 @@
                 <a:ea typeface="Arial" pitchFamily="34" charset="-122"/>
                 <a:cs typeface="Arial" pitchFamily="34" charset="-120"/>
               </a:rPr>
-              <a:t>    neighbor_msd_cv ≈ 1.96e-14 → s 是 geometric waypoint, 不是 validated basin</a:t>
+              <a:t>    新 path 8 ns: s ∈ [1.00, 12.87] (6× 更宽 exploration)</a:t>
             </a:r>
             <a:endParaRPr lang="en-US" sz="1400" dirty="0"/>
           </a:p>
@@ -3064,7 +3064,7 @@
                 <a:ea typeface="Menlo" pitchFamily="34" charset="-122"/>
                 <a:cs typeface="Menlo" pitchFamily="34" charset="-120"/>
               </a:rPr>
-              <a:t># 45515869 COLVAR summary (sim 6.2 ns, wall 8h20m)</a:t>
+              <a:t># Pilot 45515869 s distribution (40193 frames)</a:t>
             </a:r>
             <a:endParaRPr lang="en-US" sz="1100" dirty="0"/>
           </a:p>
@@ -3081,7 +3081,7 @@
                 <a:ea typeface="Menlo" pitchFamily="34" charset="-122"/>
                 <a:cs typeface="Menlo" pitchFamily="34" charset="-120"/>
               </a:rPr>
-              <a:t>t=0        ps  s=7.09   z=0.03</a:t>
+              <a:t>s=[1,2):  16.5%   s=[7,8):   9.3%   min_z = 0.245</a:t>
             </a:r>
             <a:endParaRPr lang="en-US" sz="1100" dirty="0"/>
           </a:p>
@@ -3098,7 +3098,7 @@
                 <a:ea typeface="Menlo" pitchFamily="34" charset="-122"/>
                 <a:cs typeface="Menlo" pitchFamily="34" charset="-120"/>
               </a:rPr>
-              <a:t>t=437      ps  s=10.92  z=1.48  ← first frontier</a:t>
+              <a:t>s=[2,3):  10.2%   s=[8,9):   6.6%   mean_z = 1.530</a:t>
             </a:r>
             <a:endParaRPr lang="en-US" sz="1100" dirty="0"/>
           </a:p>
@@ -3115,7 +3115,7 @@
                 <a:ea typeface="Menlo" pitchFamily="34" charset="-122"/>
                 <a:cs typeface="Menlo" pitchFamily="34" charset="-120"/>
               </a:rPr>
-              <a:t>t=437-6085 ps  plateau at max_s=10.92</a:t>
+              <a:t>s=[3,4):  10.7%   s=[9,10):  5.2%   max_z = 2.588 (near wall)</a:t>
             </a:r>
             <a:endParaRPr lang="en-US" sz="1100" dirty="0"/>
           </a:p>
@@ -3132,7 +3132,7 @@
                 <a:ea typeface="Menlo" pitchFamily="34" charset="-122"/>
                 <a:cs typeface="Menlo" pitchFamily="34" charset="-120"/>
               </a:rPr>
-              <a:t>t=6085     ps  s=12.87  ← GATE CLEARED (transient ~120 ps)</a:t>
+              <a:t>s=[4,5):  12.5%   s=[10,11): 4.4%</a:t>
             </a:r>
             <a:endParaRPr lang="en-US" sz="1100" dirty="0"/>
           </a:p>
@@ -3149,7 +3149,41 @@
                 <a:ea typeface="Menlo" pitchFamily="34" charset="-122"/>
                 <a:cs typeface="Menlo" pitchFamily="34" charset="-120"/>
               </a:rPr>
-              <a:t>t=6200     ps  s=7-9    ← walker retreated, 震荡 region</a:t>
+              <a:t>s=[5,6):  11.8%   s=[11,12): 1.5%</a:t>
+            </a:r>
+            <a:endParaRPr lang="en-US" sz="1100" dirty="0"/>
+          </a:p>
+          <a:p>
+            <a:pPr algn="l" indent="0" marL="0">
+              <a:buNone/>
+            </a:pPr>
+            <a:r>
+              <a:rPr lang="en-US" sz="1100" dirty="0">
+                <a:solidFill>
+                  <a:srgbClr val="000000"/>
+                </a:solidFill>
+                <a:latin typeface="Menlo" pitchFamily="34" charset="0"/>
+                <a:ea typeface="Menlo" pitchFamily="34" charset="-122"/>
+                <a:cs typeface="Menlo" pitchFamily="34" charset="-120"/>
+              </a:rPr>
+              <a:t>s=[6,7):  11.3%   s=[12,13): 0.04%</a:t>
+            </a:r>
+            <a:endParaRPr lang="en-US" sz="1100" dirty="0"/>
+          </a:p>
+          <a:p>
+            <a:pPr algn="l" indent="0" marL="0">
+              <a:buNone/>
+            </a:pPr>
+            <a:r>
+              <a:rPr lang="en-US" sz="1100" dirty="0">
+                <a:solidFill>
+                  <a:srgbClr val="000000"/>
+                </a:solidFill>
+                <a:latin typeface="Menlo" pitchFamily="34" charset="0"/>
+                <a:ea typeface="Menlo" pitchFamily="34" charset="-122"/>
+                <a:cs typeface="Menlo" pitchFamily="34" charset="-120"/>
+              </a:rPr>
+              <a:t>start.gro at t=0: s=7.09, z=1.68 (off-path projection)</a:t>
             </a:r>
             <a:endParaRPr lang="en-US" sz="1100" dirty="0"/>
           </a:p>
@@ -3188,7 +3222,7 @@
                 <a:ea typeface="Arial" pitchFamily="34" charset="-122"/>
                 <a:cs typeface="Arial" pitchFamily="34" charset="-120"/>
               </a:rPr>
-              <a:t>Source: Longleaf 45515869 COLVAR (live)</a:t>
+              <a:t>Source: Raw COLVAR analysis 2026-04-24</a:t>
             </a:r>
             <a:endParaRPr lang="en-US" sz="900" dirty="0"/>
           </a:p>
@@ -3205,7 +3239,7 @@
                 <a:ea typeface="Arial" pitchFamily="34" charset="-122"/>
                 <a:cs typeface="Arial" pitchFamily="34" charset="-120"/>
               </a:rPr>
-              <a:t>Source: replication/metadynamics/path_seqaligned/REVERSE_SANITY_CHECK.md</a:t>
+              <a:t>Source: ChatGPT Pro independent verification 2026-04-24</a:t>
             </a:r>
             <a:endParaRPr lang="en-US" sz="900" dirty="0"/>
           </a:p>
@@ -3244,7 +3278,7 @@
                 <a:ea typeface="Arial" pitchFamily="34" charset="-122"/>
                 <a:cs typeface="Arial" pitchFamily="34" charset="-120"/>
               </a:rPr>
-              <a:t>Slide 9 / 17  ·  GATE CLEARED · 10-walker launch 已 conditional-approve</a:t>
+              <a:t>Slide 9 / 17  ·  corrected path exposes s=1-12 region  ·  seeding needs re-selection</a:t>
             </a:r>
             <a:endParaRPr lang="en-US" sz="900" dirty="0"/>
           </a:p>
@@ -10203,7 +10237,7 @@
                 <a:ea typeface="Arial" pitchFamily="34" charset="-122"/>
                 <a:cs typeface="Arial" pitchFamily="34" charset="-120"/>
               </a:rPr>
-              <a:t>Pilot 45515869 于 t=6085 ps 单次 transient 越过 s=12 gate</a:t>
+              <a:t>Pilot 8 ns 证实 corrected path 能 sample s=1 到 12.87</a:t>
             </a:r>
             <a:pPr algn="l" marL="342900" indent="-342900">
               <a:spcAft>
@@ -10221,7 +10255,25 @@
                 <a:ea typeface="Arial" pitchFamily="34" charset="-122"/>
                 <a:cs typeface="Arial" pitchFamily="34" charset="-120"/>
               </a:rPr>
-              <a:t>    corrected path 端到端通路 confirm; 10-walker shared bias 启动依据</a:t>
+              <a:t>    caveat: start.gro (t=0) 是 off-path projection, z=1.68</a:t>
+            </a:r>
+            <a:pPr algn="l" marL="342900" indent="-342900">
+              <a:spcAft>
+                <a:spcPts val="600"/>
+              </a:spcAft>
+              <a:buSzPct val="100000"/>
+              <a:buChar char="•"/>
+            </a:pPr>
+            <a:r>
+              <a:rPr lang="en-US" sz="1400" dirty="0">
+                <a:solidFill>
+                  <a:srgbClr val="000000"/>
+                </a:solidFill>
+                <a:latin typeface="Arial" pitchFamily="34" charset="0"/>
+                <a:ea typeface="Arial" pitchFamily="34" charset="-122"/>
+                <a:cs typeface="Arial" pitchFamily="34" charset="-120"/>
+              </a:rPr>
+              <a:t>    10-walker seeding 从 pilot 低-z frames 重选 (in progress)</a:t>
             </a:r>
             <a:endParaRPr lang="en-US" sz="1400" dirty="0"/>
           </a:p>

--- a/reports/GroupMeeting_2026-04-24.pptx
+++ b/reports/GroupMeeting_2026-04-24.pptx
@@ -2412,6 +2412,10 @@
             <a:prstDash val="solid"/>
           </a:ln>
         </p:spPr>
+        <p:txBody>
+          <a:bodyPr/>
+          <a:p/>
+        </p:txBody>
       </p:sp>
       <p:sp>
         <p:nvSpPr>
@@ -2437,6 +2441,10 @@
             <a:prstDash val="solid"/>
           </a:ln>
         </p:spPr>
+        <p:txBody>
+          <a:bodyPr/>
+          <a:p/>
+        </p:txBody>
       </p:sp>
       <p:sp>
         <p:nvSpPr>
@@ -2650,6 +2658,10 @@
             <a:prstDash val="solid"/>
           </a:ln>
         </p:spPr>
+        <p:txBody>
+          <a:bodyPr/>
+          <a:p/>
+        </p:txBody>
       </p:sp>
       <p:sp>
         <p:nvSpPr>
@@ -3284,6 +3296,30 @@
           </a:p>
         </p:txBody>
       </p:sp>
+      <p:pic>
+        <p:nvPicPr>
+          <p:cNvPr id="10" name="Picture 9" descr="s_trend_slide.png"/>
+          <p:cNvPicPr>
+            <a:picLocks noChangeAspect="1"/>
+          </p:cNvPicPr>
+          <p:nvPr/>
+        </p:nvPicPr>
+        <p:blipFill>
+          <a:blip r:embed="rId3"/>
+          <a:stretch>
+            <a:fillRect/>
+          </a:stretch>
+        </p:blipFill>
+        <p:spPr>
+          <a:xfrm>
+            <a:off x="2667000" y="2743200"/>
+            <a:ext cx="6858000" cy="3840480"/>
+          </a:xfrm>
+          <a:prstGeom prst="rect">
+            <a:avLst/>
+          </a:prstGeom>
+        </p:spPr>
+      </p:pic>
     </p:spTree>
   </p:cSld>
   <p:clrMapOvr>
@@ -9923,6 +9959,10 @@
             <a:prstDash val="solid"/>
           </a:ln>
         </p:spPr>
+        <p:txBody>
+          <a:bodyPr/>
+          <a:p/>
+        </p:txBody>
       </p:sp>
       <p:sp>
         <p:nvSpPr>
@@ -10413,6 +10453,10 @@
             <a:prstDash val="solid"/>
           </a:ln>
         </p:spPr>
+        <p:txBody>
+          <a:bodyPr/>
+          <a:p/>
+        </p:txBody>
       </p:sp>
       <p:sp>
         <p:nvSpPr>
@@ -12947,6 +12991,10 @@
             <a:prstDash val="solid"/>
           </a:ln>
         </p:spPr>
+        <p:txBody>
+          <a:bodyPr/>
+          <a:p/>
+        </p:txBody>
       </p:sp>
       <p:sp>
         <p:nvSpPr>
@@ -13485,6 +13533,10 @@
             <a:prstDash val="solid"/>
           </a:ln>
         </p:spPr>
+        <p:txBody>
+          <a:bodyPr/>
+          <a:p/>
+        </p:txBody>
       </p:sp>
       <p:sp>
         <p:nvSpPr>
@@ -13588,6 +13640,10 @@
             <a:prstDash val="solid"/>
           </a:ln>
         </p:spPr>
+        <p:txBody>
+          <a:bodyPr/>
+          <a:p/>
+        </p:txBody>
       </p:sp>
       <p:sp>
         <p:nvSpPr>
@@ -14066,6 +14122,10 @@
             <a:prstDash val="solid"/>
           </a:ln>
         </p:spPr>
+        <p:txBody>
+          <a:bodyPr/>
+          <a:p/>
+        </p:txBody>
       </p:sp>
       <p:sp>
         <p:nvSpPr>
@@ -15760,6 +15820,10 @@
             <a:prstDash val="solid"/>
           </a:ln>
         </p:spPr>
+        <p:txBody>
+          <a:bodyPr/>
+          <a:p/>
+        </p:txBody>
       </p:sp>
       <p:sp>
         <p:nvSpPr>
@@ -15863,6 +15927,10 @@
             <a:prstDash val="solid"/>
           </a:ln>
         </p:spPr>
+        <p:txBody>
+          <a:bodyPr/>
+          <a:p/>
+        </p:txBody>
       </p:sp>
       <p:sp>
         <p:nvSpPr>
@@ -16027,6 +16095,10 @@
             <a:prstDash val="solid"/>
           </a:ln>
         </p:spPr>
+        <p:txBody>
+          <a:bodyPr/>
+          <a:p/>
+        </p:txBody>
       </p:sp>
       <p:sp>
         <p:nvSpPr>
@@ -16414,6 +16486,10 @@
             <a:prstDash val="solid"/>
           </a:ln>
         </p:spPr>
+        <p:txBody>
+          <a:bodyPr/>
+          <a:p/>
+        </p:txBody>
       </p:sp>
       <p:sp>
         <p:nvSpPr>
@@ -18399,6 +18475,10 @@
             <a:prstDash val="solid"/>
           </a:ln>
         </p:spPr>
+        <p:txBody>
+          <a:bodyPr/>
+          <a:p/>
+        </p:txBody>
       </p:sp>
       <p:sp>
         <p:nvSpPr>

--- a/reports/GroupMeeting_2026-04-24.pptx
+++ b/reports/GroupMeeting_2026-04-24.pptx
@@ -23,6 +23,7 @@
     <p:sldId id="271" r:id="rId17"/>
     <p:sldId id="272" r:id="rId18"/>
     <p:sldId id="273" r:id="rId19"/>
+    <p:sldId id="274" r:id="rId25"/>
   </p:sldIdLst>
   <p:notesMasterIdLst>
     <p:notesMasterId r:id="rId20"/>
@@ -3298,22 +3299,22 @@
       </p:sp>
       <p:pic>
         <p:nvPicPr>
-          <p:cNvPr id="10" name="Picture 9" descr="s_trend_slide.png"/>
+          <p:cNvPr id="10" name="Picture 9" descr="sz_2d_pilot_jacs_style.png"/>
           <p:cNvPicPr>
             <a:picLocks noChangeAspect="1"/>
           </p:cNvPicPr>
           <p:nvPr/>
         </p:nvPicPr>
         <p:blipFill>
-          <a:blip r:embed="rId3"/>
+          <a:blip r:embed="rId4"/>
           <a:stretch>
             <a:fillRect/>
           </a:stretch>
         </p:blipFill>
         <p:spPr>
           <a:xfrm>
-            <a:off x="2667000" y="2743200"/>
-            <a:ext cx="6858000" cy="3840480"/>
+            <a:off x="2209800" y="2834640"/>
+            <a:ext cx="7772400" cy="3840480"/>
           </a:xfrm>
           <a:prstGeom prst="rect">
             <a:avLst/>
@@ -9900,6 +9901,135 @@
               <a:t>Slide 17 / 17  ·  2026-05-01 hard kill-switch  ·  Q &amp; A</a:t>
             </a:r>
             <a:endParaRPr lang="en-US" sz="900" dirty="0"/>
+          </a:p>
+        </p:txBody>
+      </p:sp>
+    </p:spTree>
+  </p:cSld>
+  <p:clrMapOvr>
+    <a:masterClrMapping/>
+  </p:clrMapOvr>
+</p:sld>
+</file>
+
+<file path=ppt/slides/slide19.xml><?xml version="1.0" encoding="utf-8"?>
+<p:sld xmlns:a="http://schemas.openxmlformats.org/drawingml/2006/main" xmlns:p="http://schemas.openxmlformats.org/presentationml/2006/main" xmlns:r="http://schemas.openxmlformats.org/officeDocument/2006/relationships">
+  <p:cSld>
+    <p:spTree>
+      <p:nvGrpSpPr>
+        <p:cNvPr id="1" name=""/>
+        <p:cNvGrpSpPr/>
+        <p:nvPr/>
+      </p:nvGrpSpPr>
+      <p:grpSpPr/>
+      <p:sp>
+        <p:nvSpPr>
+          <p:cNvPr id="2" name="TextBox 1"/>
+          <p:cNvSpPr txBox="1"/>
+          <p:nvPr/>
+        </p:nvSpPr>
+        <p:spPr>
+          <a:xfrm>
+            <a:off x="457200" y="274320"/>
+            <a:ext cx="11247120" cy="548640"/>
+          </a:xfrm>
+          <a:prstGeom prst="rect">
+            <a:avLst/>
+          </a:prstGeom>
+          <a:noFill/>
+        </p:spPr>
+        <p:txBody>
+          <a:bodyPr wrap="none">
+            <a:spAutoFit/>
+          </a:bodyPr>
+          <a:lstStyle/>
+          <a:p>
+            <a:r>
+              <a:rPr sz="2400" b="1"/>
+              <a:t>(s, z) 2D Distribution — Old vs New Path Comparison</a:t>
+            </a:r>
+          </a:p>
+        </p:txBody>
+      </p:sp>
+      <p:sp>
+        <p:nvSpPr>
+          <p:cNvPr id="3" name="TextBox 2"/>
+          <p:cNvSpPr txBox="1"/>
+          <p:nvPr/>
+        </p:nvSpPr>
+        <p:spPr>
+          <a:xfrm>
+            <a:off x="457200" y="868680"/>
+            <a:ext cx="11247120" cy="365760"/>
+          </a:xfrm>
+          <a:prstGeom prst="rect">
+            <a:avLst/>
+          </a:prstGeom>
+          <a:noFill/>
+        </p:spPr>
+        <p:txBody>
+          <a:bodyPr wrap="none">
+            <a:spAutoFit/>
+          </a:bodyPr>
+          <a:lstStyle/>
+          <a:p>
+            <a:r>
+              <a:rPr sz="1300"/>
+              <a:t>同 MD 系统 + 同参数，只换 path — old naive 压缩到 s&lt;2 区域；corrected FP-034 path 铺开到 s=1–12.87</a:t>
+            </a:r>
+          </a:p>
+        </p:txBody>
+      </p:sp>
+      <p:pic>
+        <p:nvPicPr>
+          <p:cNvPr id="4" name="Picture 3" descr="sz_2d_distribution.png"/>
+          <p:cNvPicPr>
+            <a:picLocks noChangeAspect="1"/>
+          </p:cNvPicPr>
+          <p:nvPr/>
+        </p:nvPicPr>
+        <p:blipFill>
+          <a:blip r:embed="rId2"/>
+          <a:stretch>
+            <a:fillRect/>
+          </a:stretch>
+        </p:blipFill>
+        <p:spPr>
+          <a:xfrm>
+            <a:off x="457200" y="1463040"/>
+            <a:ext cx="11247120" cy="4846320"/>
+          </a:xfrm>
+          <a:prstGeom prst="rect">
+            <a:avLst/>
+          </a:prstGeom>
+        </p:spPr>
+      </p:pic>
+      <p:sp>
+        <p:nvSpPr>
+          <p:cNvPr id="5" name="TextBox 4"/>
+          <p:cNvSpPr txBox="1"/>
+          <p:nvPr/>
+        </p:nvSpPr>
+        <p:spPr>
+          <a:xfrm>
+            <a:off x="457200" y="6492240"/>
+            <a:ext cx="11247120" cy="274320"/>
+          </a:xfrm>
+          <a:prstGeom prst="rect">
+            <a:avLst/>
+          </a:prstGeom>
+          <a:noFill/>
+        </p:spPr>
+        <p:txBody>
+          <a:bodyPr wrap="none">
+            <a:spAutoFit/>
+          </a:bodyPr>
+          <a:lstStyle/>
+          <a:p>
+            <a:r>
+              <a:rPr sz="900"/>
+              <a:t>Slide 10b / 17  ·  (s, z) 2D density  ·  baseline 45324928 (16ns) vs pilot 45515869 (8ns)</a:t>
+            </a:r>
           </a:p>
         </p:txBody>
       </p:sp>
